--- a/slides/Section02 - All about Apache Spark.pptx
+++ b/slides/Section02 - All about Apache Spark.pptx
@@ -6,10 +6,10 @@
     <p:sldMasterId id="2147483733" r:id="rId2"/>
   </p:sldMasterIdLst>
   <p:notesMasterIdLst>
-    <p:notesMasterId r:id="rId12"/>
+    <p:notesMasterId r:id="rId20"/>
   </p:notesMasterIdLst>
   <p:handoutMasterIdLst>
-    <p:handoutMasterId r:id="rId13"/>
+    <p:handoutMasterId r:id="rId21"/>
   </p:handoutMasterIdLst>
   <p:sldIdLst>
     <p:sldId id="574" r:id="rId3"/>
@@ -21,6 +21,14 @@
     <p:sldId id="642" r:id="rId9"/>
     <p:sldId id="645" r:id="rId10"/>
     <p:sldId id="644" r:id="rId11"/>
+    <p:sldId id="646" r:id="rId12"/>
+    <p:sldId id="647" r:id="rId13"/>
+    <p:sldId id="648" r:id="rId14"/>
+    <p:sldId id="649" r:id="rId15"/>
+    <p:sldId id="651" r:id="rId16"/>
+    <p:sldId id="650" r:id="rId17"/>
+    <p:sldId id="652" r:id="rId18"/>
+    <p:sldId id="653" r:id="rId19"/>
   </p:sldIdLst>
   <p:sldSz cx="12192000" cy="6858000"/>
   <p:notesSz cx="6858000" cy="9144000"/>
@@ -160,8 +168,177 @@
 </p:presentation>
 </file>
 
+<file path=ppt/revisionInfo.xml><?xml version="1.0" encoding="utf-8"?>
+<p1510:revInfo xmlns:a="http://schemas.openxmlformats.org/drawingml/2006/main" xmlns:r="http://schemas.openxmlformats.org/officeDocument/2006/relationships" xmlns:p1510="http://schemas.microsoft.com/office/powerpoint/2015/10/main">
+  <p1510:revLst>
+    <p1510:client id="{E609E842-0A82-4DBC-B006-019C05D0F453}" v="30" dt="2025-08-11T06:45:02.502"/>
+  </p1510:revLst>
+</p1510:revInfo>
+</file>
+
 <file path=ppt/changesInfos/changesInfo1.xml><?xml version="1.0" encoding="utf-8"?>
 <pc:chgInfo xmlns:a="http://schemas.openxmlformats.org/drawingml/2006/main" xmlns:r="http://schemas.openxmlformats.org/officeDocument/2006/relationships" xmlns:ac="http://schemas.microsoft.com/office/drawing/2013/main/command" xmlns:pc="http://schemas.microsoft.com/office/powerpoint/2013/main/command">
+  <pc:docChgLst>
+    <pc:chgData name="Learning Cloud" userId="622d7d18e0d997fa" providerId="LiveId" clId="{E609E842-0A82-4DBC-B006-019C05D0F453}"/>
+    <pc:docChg chg="undo custSel addSld modSld sldOrd">
+      <pc:chgData name="Learning Cloud" userId="622d7d18e0d997fa" providerId="LiveId" clId="{E609E842-0A82-4DBC-B006-019C05D0F453}" dt="2025-08-11T06:45:30.099" v="194" actId="5793"/>
+      <pc:docMkLst>
+        <pc:docMk/>
+      </pc:docMkLst>
+      <pc:sldChg chg="modSp add mod ord modAnim">
+        <pc:chgData name="Learning Cloud" userId="622d7d18e0d997fa" providerId="LiveId" clId="{E609E842-0A82-4DBC-B006-019C05D0F453}" dt="2025-08-11T06:38:06.532" v="7"/>
+        <pc:sldMkLst>
+          <pc:docMk/>
+          <pc:sldMk cId="2865566966" sldId="646"/>
+        </pc:sldMkLst>
+        <pc:spChg chg="mod">
+          <ac:chgData name="Learning Cloud" userId="622d7d18e0d997fa" providerId="LiveId" clId="{E609E842-0A82-4DBC-B006-019C05D0F453}" dt="2025-08-11T06:38:06.532" v="7"/>
+          <ac:spMkLst>
+            <pc:docMk/>
+            <pc:sldMk cId="2865566966" sldId="646"/>
+            <ac:spMk id="2" creationId="{A3ED3AA4-0AA4-0DAE-899D-285057F72588}"/>
+          </ac:spMkLst>
+        </pc:spChg>
+      </pc:sldChg>
+      <pc:sldChg chg="modSp new mod">
+        <pc:chgData name="Learning Cloud" userId="622d7d18e0d997fa" providerId="LiveId" clId="{E609E842-0A82-4DBC-B006-019C05D0F453}" dt="2025-08-11T06:40:07.962" v="60" actId="20577"/>
+        <pc:sldMkLst>
+          <pc:docMk/>
+          <pc:sldMk cId="1844693231" sldId="647"/>
+        </pc:sldMkLst>
+        <pc:spChg chg="mod">
+          <ac:chgData name="Learning Cloud" userId="622d7d18e0d997fa" providerId="LiveId" clId="{E609E842-0A82-4DBC-B006-019C05D0F453}" dt="2025-08-11T06:38:45.957" v="10"/>
+          <ac:spMkLst>
+            <pc:docMk/>
+            <pc:sldMk cId="1844693231" sldId="647"/>
+            <ac:spMk id="2" creationId="{C6A2BCE3-AF47-0E61-95E9-BCF0982BB933}"/>
+          </ac:spMkLst>
+        </pc:spChg>
+        <pc:spChg chg="mod">
+          <ac:chgData name="Learning Cloud" userId="622d7d18e0d997fa" providerId="LiveId" clId="{E609E842-0A82-4DBC-B006-019C05D0F453}" dt="2025-08-11T06:40:07.962" v="60" actId="20577"/>
+          <ac:spMkLst>
+            <pc:docMk/>
+            <pc:sldMk cId="1844693231" sldId="647"/>
+            <ac:spMk id="3" creationId="{BE1FBD36-6462-91AA-83B8-E02F1B58EB72}"/>
+          </ac:spMkLst>
+        </pc:spChg>
+      </pc:sldChg>
+      <pc:sldChg chg="modSp add mod">
+        <pc:chgData name="Learning Cloud" userId="622d7d18e0d997fa" providerId="LiveId" clId="{E609E842-0A82-4DBC-B006-019C05D0F453}" dt="2025-08-11T06:41:17.180" v="102" actId="1076"/>
+        <pc:sldMkLst>
+          <pc:docMk/>
+          <pc:sldMk cId="1913854002" sldId="648"/>
+        </pc:sldMkLst>
+        <pc:spChg chg="mod">
+          <ac:chgData name="Learning Cloud" userId="622d7d18e0d997fa" providerId="LiveId" clId="{E609E842-0A82-4DBC-B006-019C05D0F453}" dt="2025-08-11T06:40:34.052" v="64"/>
+          <ac:spMkLst>
+            <pc:docMk/>
+            <pc:sldMk cId="1913854002" sldId="648"/>
+            <ac:spMk id="2" creationId="{B8000DD6-197F-6FE9-423E-A163C78F9CCF}"/>
+          </ac:spMkLst>
+        </pc:spChg>
+        <pc:spChg chg="mod">
+          <ac:chgData name="Learning Cloud" userId="622d7d18e0d997fa" providerId="LiveId" clId="{E609E842-0A82-4DBC-B006-019C05D0F453}" dt="2025-08-11T06:41:17.180" v="102" actId="1076"/>
+          <ac:spMkLst>
+            <pc:docMk/>
+            <pc:sldMk cId="1913854002" sldId="648"/>
+            <ac:spMk id="3" creationId="{A6755A99-8278-5C00-FF0D-B5E6C8BD63DB}"/>
+          </ac:spMkLst>
+        </pc:spChg>
+      </pc:sldChg>
+      <pc:sldChg chg="modSp add mod">
+        <pc:chgData name="Learning Cloud" userId="622d7d18e0d997fa" providerId="LiveId" clId="{E609E842-0A82-4DBC-B006-019C05D0F453}" dt="2025-08-11T06:42:21.895" v="137" actId="5793"/>
+        <pc:sldMkLst>
+          <pc:docMk/>
+          <pc:sldMk cId="196103846" sldId="649"/>
+        </pc:sldMkLst>
+        <pc:spChg chg="mod">
+          <ac:chgData name="Learning Cloud" userId="622d7d18e0d997fa" providerId="LiveId" clId="{E609E842-0A82-4DBC-B006-019C05D0F453}" dt="2025-08-11T06:41:50.678" v="106"/>
+          <ac:spMkLst>
+            <pc:docMk/>
+            <pc:sldMk cId="196103846" sldId="649"/>
+            <ac:spMk id="2" creationId="{8DC42CFC-844A-C230-E234-4888EA46BE26}"/>
+          </ac:spMkLst>
+        </pc:spChg>
+        <pc:spChg chg="mod">
+          <ac:chgData name="Learning Cloud" userId="622d7d18e0d997fa" providerId="LiveId" clId="{E609E842-0A82-4DBC-B006-019C05D0F453}" dt="2025-08-11T06:42:21.895" v="137" actId="5793"/>
+          <ac:spMkLst>
+            <pc:docMk/>
+            <pc:sldMk cId="196103846" sldId="649"/>
+            <ac:spMk id="3" creationId="{C2C44D84-13C8-3C14-B7B0-29D178C6071E}"/>
+          </ac:spMkLst>
+        </pc:spChg>
+      </pc:sldChg>
+      <pc:sldChg chg="modSp new mod">
+        <pc:chgData name="Learning Cloud" userId="622d7d18e0d997fa" providerId="LiveId" clId="{E609E842-0A82-4DBC-B006-019C05D0F453}" dt="2025-08-11T06:43:38.891" v="141" actId="20577"/>
+        <pc:sldMkLst>
+          <pc:docMk/>
+          <pc:sldMk cId="4154163336" sldId="650"/>
+        </pc:sldMkLst>
+        <pc:spChg chg="mod">
+          <ac:chgData name="Learning Cloud" userId="622d7d18e0d997fa" providerId="LiveId" clId="{E609E842-0A82-4DBC-B006-019C05D0F453}" dt="2025-08-11T06:43:38.891" v="141" actId="20577"/>
+          <ac:spMkLst>
+            <pc:docMk/>
+            <pc:sldMk cId="4154163336" sldId="650"/>
+            <ac:spMk id="2" creationId="{F6CDC3F4-1B0F-FECB-B4FB-1900CB861D7C}"/>
+          </ac:spMkLst>
+        </pc:spChg>
+        <pc:spChg chg="mod">
+          <ac:chgData name="Learning Cloud" userId="622d7d18e0d997fa" providerId="LiveId" clId="{E609E842-0A82-4DBC-B006-019C05D0F453}" dt="2025-08-11T06:43:31.522" v="139"/>
+          <ac:spMkLst>
+            <pc:docMk/>
+            <pc:sldMk cId="4154163336" sldId="650"/>
+            <ac:spMk id="3" creationId="{96FF2034-FF6C-A18B-5F96-CA5B25140988}"/>
+          </ac:spMkLst>
+        </pc:spChg>
+      </pc:sldChg>
+      <pc:sldChg chg="modSp add mod modAnim">
+        <pc:chgData name="Learning Cloud" userId="622d7d18e0d997fa" providerId="LiveId" clId="{E609E842-0A82-4DBC-B006-019C05D0F453}" dt="2025-08-11T06:43:53.616" v="147"/>
+        <pc:sldMkLst>
+          <pc:docMk/>
+          <pc:sldMk cId="937685338" sldId="651"/>
+        </pc:sldMkLst>
+        <pc:spChg chg="mod">
+          <ac:chgData name="Learning Cloud" userId="622d7d18e0d997fa" providerId="LiveId" clId="{E609E842-0A82-4DBC-B006-019C05D0F453}" dt="2025-08-11T06:43:53.616" v="147"/>
+          <ac:spMkLst>
+            <pc:docMk/>
+            <pc:sldMk cId="937685338" sldId="651"/>
+            <ac:spMk id="2" creationId="{09815769-A6D5-7DFC-941A-BBEE9BEA8280}"/>
+          </ac:spMkLst>
+        </pc:spChg>
+      </pc:sldChg>
+      <pc:sldChg chg="modSp add mod">
+        <pc:chgData name="Learning Cloud" userId="622d7d18e0d997fa" providerId="LiveId" clId="{E609E842-0A82-4DBC-B006-019C05D0F453}" dt="2025-08-11T06:44:38.745" v="171" actId="20577"/>
+        <pc:sldMkLst>
+          <pc:docMk/>
+          <pc:sldMk cId="1371585690" sldId="652"/>
+        </pc:sldMkLst>
+        <pc:spChg chg="mod">
+          <ac:chgData name="Learning Cloud" userId="622d7d18e0d997fa" providerId="LiveId" clId="{E609E842-0A82-4DBC-B006-019C05D0F453}" dt="2025-08-11T06:44:38.745" v="171" actId="20577"/>
+          <ac:spMkLst>
+            <pc:docMk/>
+            <pc:sldMk cId="1371585690" sldId="652"/>
+            <ac:spMk id="3" creationId="{5D1C4150-59BC-1F18-3968-1B957E8BA1A9}"/>
+          </ac:spMkLst>
+        </pc:spChg>
+      </pc:sldChg>
+      <pc:sldChg chg="modSp add mod">
+        <pc:chgData name="Learning Cloud" userId="622d7d18e0d997fa" providerId="LiveId" clId="{E609E842-0A82-4DBC-B006-019C05D0F453}" dt="2025-08-11T06:45:30.099" v="194" actId="5793"/>
+        <pc:sldMkLst>
+          <pc:docMk/>
+          <pc:sldMk cId="3667983875" sldId="653"/>
+        </pc:sldMkLst>
+        <pc:spChg chg="mod">
+          <ac:chgData name="Learning Cloud" userId="622d7d18e0d997fa" providerId="LiveId" clId="{E609E842-0A82-4DBC-B006-019C05D0F453}" dt="2025-08-11T06:45:30.099" v="194" actId="5793"/>
+          <ac:spMkLst>
+            <pc:docMk/>
+            <pc:sldMk cId="3667983875" sldId="653"/>
+            <ac:spMk id="3" creationId="{6E3DEB95-A86B-6972-8EDB-D614CBF2F558}"/>
+          </ac:spMkLst>
+        </pc:spChg>
+      </pc:sldChg>
+    </pc:docChg>
+  </pc:docChgLst>
   <pc:docChgLst>
     <pc:chgData name="sai kiran" userId="89fb170e4985490f" providerId="LiveId" clId="{FEBF02E7-25A2-4A71-88C9-3A520D891940}"/>
     <pc:docChg chg="undo custSel addSld delSld modSld sldOrd">
@@ -245,14 +422,6 @@
           <pc:docMk/>
           <pc:sldMk cId="1650325546" sldId="582"/>
         </pc:sldMkLst>
-        <pc:picChg chg="del">
-          <ac:chgData name="sai kiran" userId="89fb170e4985490f" providerId="LiveId" clId="{FEBF02E7-25A2-4A71-88C9-3A520D891940}" dt="2025-07-29T17:18:58.654" v="116" actId="478"/>
-          <ac:picMkLst>
-            <pc:docMk/>
-            <pc:sldMk cId="1650325546" sldId="582"/>
-            <ac:picMk id="4" creationId="{D80B2E93-97B5-20E2-2C60-B91F766EA759}"/>
-          </ac:picMkLst>
-        </pc:picChg>
       </pc:sldChg>
       <pc:sldChg chg="del">
         <pc:chgData name="sai kiran" userId="89fb170e4985490f" providerId="LiveId" clId="{FEBF02E7-25A2-4A71-88C9-3A520D891940}" dt="2025-07-29T17:05:56.678" v="29" actId="47"/>
@@ -267,14 +436,6 @@
           <pc:docMk/>
           <pc:sldMk cId="226818292" sldId="584"/>
         </pc:sldMkLst>
-        <pc:picChg chg="del">
-          <ac:chgData name="sai kiran" userId="89fb170e4985490f" providerId="LiveId" clId="{FEBF02E7-25A2-4A71-88C9-3A520D891940}" dt="2025-07-29T17:18:50.934" v="114" actId="478"/>
-          <ac:picMkLst>
-            <pc:docMk/>
-            <pc:sldMk cId="226818292" sldId="584"/>
-            <ac:picMk id="4" creationId="{D80B2E93-97B5-20E2-2C60-B91F766EA759}"/>
-          </ac:picMkLst>
-        </pc:picChg>
       </pc:sldChg>
       <pc:sldChg chg="del">
         <pc:chgData name="sai kiran" userId="89fb170e4985490f" providerId="LiveId" clId="{FEBF02E7-25A2-4A71-88C9-3A520D891940}" dt="2025-07-29T17:05:50.592" v="19" actId="47"/>
@@ -542,14 +703,6 @@
           <pc:docMk/>
           <pc:sldMk cId="125441112" sldId="642"/>
         </pc:sldMkLst>
-        <pc:spChg chg="add del">
-          <ac:chgData name="sai kiran" userId="89fb170e4985490f" providerId="LiveId" clId="{FEBF02E7-25A2-4A71-88C9-3A520D891940}" dt="2025-07-29T17:10:55.820" v="52" actId="22"/>
-          <ac:spMkLst>
-            <pc:docMk/>
-            <pc:sldMk cId="125441112" sldId="642"/>
-            <ac:spMk id="5" creationId="{9C651965-2850-4D70-BA1E-D1BCBE35DF32}"/>
-          </ac:spMkLst>
-        </pc:spChg>
         <pc:spChg chg="add mod">
           <ac:chgData name="sai kiran" userId="89fb170e4985490f" providerId="LiveId" clId="{FEBF02E7-25A2-4A71-88C9-3A520D891940}" dt="2025-07-29T17:12:43.729" v="79" actId="20577"/>
           <ac:spMkLst>
@@ -588,22 +741,6 @@
           <pc:docMk/>
           <pc:sldMk cId="2504836815" sldId="644"/>
         </pc:sldMkLst>
-        <pc:spChg chg="del">
-          <ac:chgData name="sai kiran" userId="89fb170e4985490f" providerId="LiveId" clId="{FEBF02E7-25A2-4A71-88C9-3A520D891940}" dt="2025-07-29T17:17:35.421" v="83" actId="931"/>
-          <ac:spMkLst>
-            <pc:docMk/>
-            <pc:sldMk cId="2504836815" sldId="644"/>
-            <ac:spMk id="3" creationId="{E83AD87B-9DF9-4FB6-8020-34D90B26BC4F}"/>
-          </ac:spMkLst>
-        </pc:spChg>
-        <pc:spChg chg="add del">
-          <ac:chgData name="sai kiran" userId="89fb170e4985490f" providerId="LiveId" clId="{FEBF02E7-25A2-4A71-88C9-3A520D891940}" dt="2025-07-29T17:17:10.639" v="82" actId="22"/>
-          <ac:spMkLst>
-            <pc:docMk/>
-            <pc:sldMk cId="2504836815" sldId="644"/>
-            <ac:spMk id="5" creationId="{BD1F863E-A3CB-42D5-A71B-8B2986C51534}"/>
-          </ac:spMkLst>
-        </pc:spChg>
         <pc:picChg chg="add mod">
           <ac:chgData name="sai kiran" userId="89fb170e4985490f" providerId="LiveId" clId="{FEBF02E7-25A2-4A71-88C9-3A520D891940}" dt="2025-07-29T17:17:55.754" v="88" actId="14100"/>
           <ac:picMkLst>
@@ -739,7 +876,7 @@
               <a:pPr>
                 <a:defRPr/>
               </a:pPr>
-              <a:t>30-07-2025</a:t>
+              <a:t>11-08-2025</a:t>
             </a:fld>
             <a:endParaRPr lang="en-IN"/>
           </a:p>
@@ -949,7 +1086,7 @@
               <a:pPr>
                 <a:defRPr/>
               </a:pPr>
-              <a:t>7/30/2025</a:t>
+              <a:t>8/11/2025</a:t>
             </a:fld>
             <a:endParaRPr lang="en-US"/>
           </a:p>
@@ -1516,7 +1653,7 @@
               <a:pPr>
                 <a:defRPr/>
               </a:pPr>
-              <a:t>30-07-2025</a:t>
+              <a:t>11-08-2025</a:t>
             </a:fld>
             <a:endParaRPr lang="en-IN"/>
           </a:p>
@@ -1731,7 +1868,7 @@
               <a:pPr>
                 <a:defRPr/>
               </a:pPr>
-              <a:t>30-07-2025</a:t>
+              <a:t>11-08-2025</a:t>
             </a:fld>
             <a:endParaRPr lang="en-IN"/>
           </a:p>
@@ -1956,7 +2093,7 @@
               <a:pPr>
                 <a:defRPr/>
               </a:pPr>
-              <a:t>30-07-2025</a:t>
+              <a:t>11-08-2025</a:t>
             </a:fld>
             <a:endParaRPr lang="en-IN"/>
           </a:p>
@@ -2193,7 +2330,7 @@
               <a:pPr>
                 <a:defRPr/>
               </a:pPr>
-              <a:t>30-07-2025</a:t>
+              <a:t>11-08-2025</a:t>
             </a:fld>
             <a:endParaRPr lang="en-IN"/>
           </a:p>
@@ -2408,7 +2545,7 @@
               <a:pPr>
                 <a:defRPr/>
               </a:pPr>
-              <a:t>30-07-2025</a:t>
+              <a:t>11-08-2025</a:t>
             </a:fld>
             <a:endParaRPr lang="en-IN"/>
           </a:p>
@@ -2699,7 +2836,7 @@
               <a:pPr>
                 <a:defRPr/>
               </a:pPr>
-              <a:t>30-07-2025</a:t>
+              <a:t>11-08-2025</a:t>
             </a:fld>
             <a:endParaRPr lang="en-IN"/>
           </a:p>
@@ -2976,7 +3113,7 @@
               <a:pPr>
                 <a:defRPr/>
               </a:pPr>
-              <a:t>30-07-2025</a:t>
+              <a:t>11-08-2025</a:t>
             </a:fld>
             <a:endParaRPr lang="en-IN"/>
           </a:p>
@@ -3388,7 +3525,7 @@
               <a:pPr>
                 <a:defRPr/>
               </a:pPr>
-              <a:t>30-07-2025</a:t>
+              <a:t>11-08-2025</a:t>
             </a:fld>
             <a:endParaRPr lang="en-IN"/>
           </a:p>
@@ -3551,7 +3688,7 @@
               <a:pPr>
                 <a:defRPr/>
               </a:pPr>
-              <a:t>30-07-2025</a:t>
+              <a:t>11-08-2025</a:t>
             </a:fld>
             <a:endParaRPr lang="en-IN"/>
           </a:p>
@@ -3691,7 +3828,7 @@
               <a:pPr>
                 <a:defRPr/>
               </a:pPr>
-              <a:t>30-07-2025</a:t>
+              <a:t>11-08-2025</a:t>
             </a:fld>
             <a:endParaRPr lang="en-IN"/>
           </a:p>
@@ -4013,7 +4150,7 @@
               <a:pPr>
                 <a:defRPr/>
               </a:pPr>
-              <a:t>30-07-2025</a:t>
+              <a:t>11-08-2025</a:t>
             </a:fld>
             <a:endParaRPr lang="en-IN"/>
           </a:p>
@@ -4228,7 +4365,7 @@
               <a:pPr>
                 <a:defRPr/>
               </a:pPr>
-              <a:t>30-07-2025</a:t>
+              <a:t>11-08-2025</a:t>
             </a:fld>
             <a:endParaRPr lang="en-IN"/>
           </a:p>
@@ -4533,7 +4670,7 @@
               <a:pPr>
                 <a:defRPr/>
               </a:pPr>
-              <a:t>30-07-2025</a:t>
+              <a:t>11-08-2025</a:t>
             </a:fld>
             <a:endParaRPr lang="en-IN"/>
           </a:p>
@@ -4748,7 +4885,7 @@
               <a:pPr>
                 <a:defRPr/>
               </a:pPr>
-              <a:t>30-07-2025</a:t>
+              <a:t>11-08-2025</a:t>
             </a:fld>
             <a:endParaRPr lang="en-IN"/>
           </a:p>
@@ -4973,7 +5110,7 @@
               <a:pPr>
                 <a:defRPr/>
               </a:pPr>
-              <a:t>30-07-2025</a:t>
+              <a:t>11-08-2025</a:t>
             </a:fld>
             <a:endParaRPr lang="en-IN"/>
           </a:p>
@@ -5264,7 +5401,7 @@
               <a:pPr>
                 <a:defRPr/>
               </a:pPr>
-              <a:t>30-07-2025</a:t>
+              <a:t>11-08-2025</a:t>
             </a:fld>
             <a:endParaRPr lang="en-IN"/>
           </a:p>
@@ -5541,7 +5678,7 @@
               <a:pPr>
                 <a:defRPr/>
               </a:pPr>
-              <a:t>30-07-2025</a:t>
+              <a:t>11-08-2025</a:t>
             </a:fld>
             <a:endParaRPr lang="en-IN"/>
           </a:p>
@@ -5953,7 +6090,7 @@
               <a:pPr>
                 <a:defRPr/>
               </a:pPr>
-              <a:t>30-07-2025</a:t>
+              <a:t>11-08-2025</a:t>
             </a:fld>
             <a:endParaRPr lang="en-IN"/>
           </a:p>
@@ -6116,7 +6253,7 @@
               <a:pPr>
                 <a:defRPr/>
               </a:pPr>
-              <a:t>30-07-2025</a:t>
+              <a:t>11-08-2025</a:t>
             </a:fld>
             <a:endParaRPr lang="en-IN"/>
           </a:p>
@@ -6256,7 +6393,7 @@
               <a:pPr>
                 <a:defRPr/>
               </a:pPr>
-              <a:t>30-07-2025</a:t>
+              <a:t>11-08-2025</a:t>
             </a:fld>
             <a:endParaRPr lang="en-IN"/>
           </a:p>
@@ -6578,7 +6715,7 @@
               <a:pPr>
                 <a:defRPr/>
               </a:pPr>
-              <a:t>30-07-2025</a:t>
+              <a:t>11-08-2025</a:t>
             </a:fld>
             <a:endParaRPr lang="en-IN"/>
           </a:p>
@@ -6879,7 +7016,7 @@
               <a:pPr>
                 <a:defRPr/>
               </a:pPr>
-              <a:t>30-07-2025</a:t>
+              <a:t>11-08-2025</a:t>
             </a:fld>
             <a:endParaRPr lang="en-IN"/>
           </a:p>
@@ -7199,7 +7336,7 @@
               <a:pPr>
                 <a:defRPr/>
               </a:pPr>
-              <a:t>30-07-2025</a:t>
+              <a:t>11-08-2025</a:t>
             </a:fld>
             <a:endParaRPr lang="en-IN"/>
           </a:p>
@@ -7986,7 +8123,7 @@
               <a:pPr>
                 <a:defRPr/>
               </a:pPr>
-              <a:t>30-07-2025</a:t>
+              <a:t>11-08-2025</a:t>
             </a:fld>
             <a:endParaRPr lang="en-IN"/>
           </a:p>
@@ -8740,6 +8877,1323 @@
       <p:bldP spid="2" grpId="0"/>
     </p:bldLst>
   </p:timing>
+</p:sld>
+</file>
+
+<file path=ppt/slides/slide10.xml><?xml version="1.0" encoding="utf-8"?>
+<p:sld xmlns:a="http://schemas.openxmlformats.org/drawingml/2006/main" xmlns:r="http://schemas.openxmlformats.org/officeDocument/2006/relationships" xmlns:p="http://schemas.openxmlformats.org/presentationml/2006/main">
+  <p:cSld>
+    <p:spTree>
+      <p:nvGrpSpPr>
+        <p:cNvPr id="1" name="">
+          <a:extLst>
+            <a:ext uri="{FF2B5EF4-FFF2-40B4-BE49-F238E27FC236}">
+              <a16:creationId xmlns:a16="http://schemas.microsoft.com/office/drawing/2014/main" id="{07E5F498-621B-46CD-DBE7-8873BB3ECE0F}"/>
+            </a:ext>
+          </a:extLst>
+        </p:cNvPr>
+        <p:cNvGrpSpPr/>
+        <p:nvPr/>
+      </p:nvGrpSpPr>
+      <p:grpSpPr>
+        <a:xfrm>
+          <a:off x="0" y="0"/>
+          <a:ext cx="0" cy="0"/>
+          <a:chOff x="0" y="0"/>
+          <a:chExt cx="0" cy="0"/>
+        </a:xfrm>
+      </p:grpSpPr>
+      <p:sp>
+        <p:nvSpPr>
+          <p:cNvPr id="2" name="Title 1">
+            <a:extLst>
+              <a:ext uri="{FF2B5EF4-FFF2-40B4-BE49-F238E27FC236}">
+                <a16:creationId xmlns:a16="http://schemas.microsoft.com/office/drawing/2014/main" id="{A3ED3AA4-0AA4-0DAE-899D-285057F72588}"/>
+              </a:ext>
+            </a:extLst>
+          </p:cNvPr>
+          <p:cNvSpPr>
+            <a:spLocks noGrp="1"/>
+          </p:cNvSpPr>
+          <p:nvPr>
+            <p:ph type="ctrTitle"/>
+          </p:nvPr>
+        </p:nvSpPr>
+        <p:spPr>
+          <a:xfrm>
+            <a:off x="0" y="2746375"/>
+            <a:ext cx="12192000" cy="793750"/>
+          </a:xfrm>
+        </p:spPr>
+        <p:txBody>
+          <a:bodyPr rtlCol="0">
+            <a:normAutofit/>
+          </a:bodyPr>
+          <a:lstStyle/>
+          <a:p>
+            <a:pPr fontAlgn="auto">
+              <a:spcAft>
+                <a:spcPts val="0"/>
+              </a:spcAft>
+              <a:defRPr/>
+            </a:pPr>
+            <a:r>
+              <a:rPr lang="en-US" sz="4000" dirty="0"/>
+              <a:t>Performance Tuning</a:t>
+            </a:r>
+          </a:p>
+        </p:txBody>
+      </p:sp>
+    </p:spTree>
+    <p:extLst>
+      <p:ext uri="{BB962C8B-B14F-4D97-AF65-F5344CB8AC3E}">
+        <p14:creationId xmlns:p14="http://schemas.microsoft.com/office/powerpoint/2010/main" val="2865566966"/>
+      </p:ext>
+    </p:extLst>
+  </p:cSld>
+  <p:clrMapOvr>
+    <a:masterClrMapping/>
+  </p:clrMapOvr>
+  <p:timing>
+    <p:tnLst>
+      <p:par>
+        <p:cTn id="1" dur="indefinite" restart="never" nodeType="tmRoot">
+          <p:childTnLst>
+            <p:seq concurrent="1" nextAc="seek">
+              <p:cTn id="2" dur="indefinite" nodeType="mainSeq">
+                <p:childTnLst>
+                  <p:par>
+                    <p:cTn id="3" fill="hold" nodeType="clickPar">
+                      <p:stCondLst>
+                        <p:cond delay="indefinite"/>
+                      </p:stCondLst>
+                      <p:childTnLst>
+                        <p:par>
+                          <p:cTn id="4" fill="hold" nodeType="withGroup">
+                            <p:stCondLst>
+                              <p:cond delay="0"/>
+                            </p:stCondLst>
+                            <p:childTnLst>
+                              <p:par>
+                                <p:cTn id="5" presetID="2" presetClass="entr" presetSubtype="8" fill="hold" grpId="0" nodeType="clickEffect">
+                                  <p:stCondLst>
+                                    <p:cond delay="0"/>
+                                  </p:stCondLst>
+                                  <p:childTnLst>
+                                    <p:set>
+                                      <p:cBhvr>
+                                        <p:cTn id="6" dur="1" fill="hold">
+                                          <p:stCondLst>
+                                            <p:cond delay="0"/>
+                                          </p:stCondLst>
+                                        </p:cTn>
+                                        <p:tgtEl>
+                                          <p:spTgt spid="2"/>
+                                        </p:tgtEl>
+                                        <p:attrNameLst>
+                                          <p:attrName>style.visibility</p:attrName>
+                                        </p:attrNameLst>
+                                      </p:cBhvr>
+                                      <p:to>
+                                        <p:strVal val="visible"/>
+                                      </p:to>
+                                    </p:set>
+                                    <p:anim calcmode="lin" valueType="num">
+                                      <p:cBhvr additive="base">
+                                        <p:cTn id="7" dur="500" fill="hold"/>
+                                        <p:tgtEl>
+                                          <p:spTgt spid="2"/>
+                                        </p:tgtEl>
+                                        <p:attrNameLst>
+                                          <p:attrName>ppt_x</p:attrName>
+                                        </p:attrNameLst>
+                                      </p:cBhvr>
+                                      <p:tavLst>
+                                        <p:tav tm="0">
+                                          <p:val>
+                                            <p:strVal val="0-#ppt_w/2"/>
+                                          </p:val>
+                                        </p:tav>
+                                        <p:tav tm="100000">
+                                          <p:val>
+                                            <p:strVal val="#ppt_x"/>
+                                          </p:val>
+                                        </p:tav>
+                                      </p:tavLst>
+                                    </p:anim>
+                                    <p:anim calcmode="lin" valueType="num">
+                                      <p:cBhvr additive="base">
+                                        <p:cTn id="8" dur="500" fill="hold"/>
+                                        <p:tgtEl>
+                                          <p:spTgt spid="2"/>
+                                        </p:tgtEl>
+                                        <p:attrNameLst>
+                                          <p:attrName>ppt_y</p:attrName>
+                                        </p:attrNameLst>
+                                      </p:cBhvr>
+                                      <p:tavLst>
+                                        <p:tav tm="0">
+                                          <p:val>
+                                            <p:strVal val="#ppt_y"/>
+                                          </p:val>
+                                        </p:tav>
+                                        <p:tav tm="100000">
+                                          <p:val>
+                                            <p:strVal val="#ppt_y"/>
+                                          </p:val>
+                                        </p:tav>
+                                      </p:tavLst>
+                                    </p:anim>
+                                  </p:childTnLst>
+                                </p:cTn>
+                              </p:par>
+                            </p:childTnLst>
+                          </p:cTn>
+                        </p:par>
+                      </p:childTnLst>
+                    </p:cTn>
+                  </p:par>
+                </p:childTnLst>
+              </p:cTn>
+              <p:prevCondLst>
+                <p:cond evt="onPrev" delay="0">
+                  <p:tgtEl>
+                    <p:sldTgt/>
+                  </p:tgtEl>
+                </p:cond>
+              </p:prevCondLst>
+              <p:nextCondLst>
+                <p:cond evt="onNext" delay="0">
+                  <p:tgtEl>
+                    <p:sldTgt/>
+                  </p:tgtEl>
+                </p:cond>
+              </p:nextCondLst>
+            </p:seq>
+          </p:childTnLst>
+        </p:cTn>
+      </p:par>
+    </p:tnLst>
+    <p:bldLst>
+      <p:bldP spid="2" grpId="0"/>
+    </p:bldLst>
+  </p:timing>
+</p:sld>
+</file>
+
+<file path=ppt/slides/slide11.xml><?xml version="1.0" encoding="utf-8"?>
+<p:sld xmlns:a="http://schemas.openxmlformats.org/drawingml/2006/main" xmlns:r="http://schemas.openxmlformats.org/officeDocument/2006/relationships" xmlns:p="http://schemas.openxmlformats.org/presentationml/2006/main">
+  <p:cSld>
+    <p:spTree>
+      <p:nvGrpSpPr>
+        <p:cNvPr id="1" name=""/>
+        <p:cNvGrpSpPr/>
+        <p:nvPr/>
+      </p:nvGrpSpPr>
+      <p:grpSpPr>
+        <a:xfrm>
+          <a:off x="0" y="0"/>
+          <a:ext cx="0" cy="0"/>
+          <a:chOff x="0" y="0"/>
+          <a:chExt cx="0" cy="0"/>
+        </a:xfrm>
+      </p:grpSpPr>
+      <p:sp>
+        <p:nvSpPr>
+          <p:cNvPr id="2" name="Title 1">
+            <a:extLst>
+              <a:ext uri="{FF2B5EF4-FFF2-40B4-BE49-F238E27FC236}">
+                <a16:creationId xmlns:a16="http://schemas.microsoft.com/office/drawing/2014/main" id="{C6A2BCE3-AF47-0E61-95E9-BCF0982BB933}"/>
+              </a:ext>
+            </a:extLst>
+          </p:cNvPr>
+          <p:cNvSpPr>
+            <a:spLocks noGrp="1"/>
+          </p:cNvSpPr>
+          <p:nvPr>
+            <p:ph type="title"/>
+          </p:nvPr>
+        </p:nvSpPr>
+        <p:spPr/>
+        <p:txBody>
+          <a:bodyPr/>
+          <a:lstStyle/>
+          <a:p>
+            <a:r>
+              <a:rPr lang="en-IN" dirty="0"/>
+              <a:t>Optimizing Spark Configuration</a:t>
+            </a:r>
+          </a:p>
+        </p:txBody>
+      </p:sp>
+      <p:sp>
+        <p:nvSpPr>
+          <p:cNvPr id="3" name="Content Placeholder 2">
+            <a:extLst>
+              <a:ext uri="{FF2B5EF4-FFF2-40B4-BE49-F238E27FC236}">
+                <a16:creationId xmlns:a16="http://schemas.microsoft.com/office/drawing/2014/main" id="{BE1FBD36-6462-91AA-83B8-E02F1B58EB72}"/>
+              </a:ext>
+            </a:extLst>
+          </p:cNvPr>
+          <p:cNvSpPr>
+            <a:spLocks noGrp="1"/>
+          </p:cNvSpPr>
+          <p:nvPr>
+            <p:ph idx="1"/>
+          </p:nvPr>
+        </p:nvSpPr>
+        <p:spPr/>
+        <p:txBody>
+          <a:bodyPr/>
+          <a:lstStyle/>
+          <a:p>
+            <a:r>
+              <a:rPr lang="en-IN" dirty="0"/>
+              <a:t> Executor and Memory Tuning:</a:t>
+            </a:r>
+          </a:p>
+          <a:p>
+            <a:pPr lvl="1"/>
+            <a:r>
+              <a:rPr lang="en-IN" dirty="0"/>
+              <a:t>Adjust executor memory and cores to optimize parallelism.</a:t>
+            </a:r>
+          </a:p>
+          <a:p>
+            <a:pPr marL="0" indent="0">
+              <a:buNone/>
+            </a:pPr>
+            <a:endParaRPr lang="en-IN" dirty="0"/>
+          </a:p>
+          <a:p>
+            <a:pPr marL="0" indent="0">
+              <a:buNone/>
+            </a:pPr>
+            <a:r>
+              <a:rPr lang="en-IN" dirty="0"/>
+              <a:t>Example:</a:t>
+            </a:r>
+          </a:p>
+          <a:p>
+            <a:r>
+              <a:rPr lang="en-IN" dirty="0"/>
+              <a:t>```python</a:t>
+            </a:r>
+          </a:p>
+          <a:p>
+            <a:pPr marL="457200" lvl="1" indent="0">
+              <a:buNone/>
+            </a:pPr>
+            <a:r>
+              <a:rPr lang="en-IN" sz="2000" dirty="0" err="1"/>
+              <a:t>spark.conf.set</a:t>
+            </a:r>
+            <a:r>
+              <a:rPr lang="en-IN" sz="2000" dirty="0"/>
+              <a:t>("</a:t>
+            </a:r>
+            <a:r>
+              <a:rPr lang="en-IN" sz="2000" dirty="0" err="1"/>
+              <a:t>spark.executor.memory</a:t>
+            </a:r>
+            <a:r>
+              <a:rPr lang="en-IN" sz="2000" dirty="0"/>
+              <a:t>", "8g")</a:t>
+            </a:r>
+          </a:p>
+          <a:p>
+            <a:pPr marL="457200" lvl="1" indent="0">
+              <a:buNone/>
+            </a:pPr>
+            <a:r>
+              <a:rPr lang="en-IN" sz="2000" dirty="0" err="1"/>
+              <a:t>spark.conf.set</a:t>
+            </a:r>
+            <a:r>
+              <a:rPr lang="en-IN" sz="2000" dirty="0"/>
+              <a:t>("</a:t>
+            </a:r>
+            <a:r>
+              <a:rPr lang="en-IN" sz="2000" dirty="0" err="1"/>
+              <a:t>spark.executor.cores</a:t>
+            </a:r>
+            <a:r>
+              <a:rPr lang="en-IN" sz="2000" dirty="0"/>
+              <a:t>", "4")</a:t>
+            </a:r>
+          </a:p>
+          <a:p>
+            <a:r>
+              <a:rPr lang="en-IN" dirty="0"/>
+              <a:t>```</a:t>
+            </a:r>
+          </a:p>
+        </p:txBody>
+      </p:sp>
+    </p:spTree>
+    <p:extLst>
+      <p:ext uri="{BB962C8B-B14F-4D97-AF65-F5344CB8AC3E}">
+        <p14:creationId xmlns:p14="http://schemas.microsoft.com/office/powerpoint/2010/main" val="1844693231"/>
+      </p:ext>
+    </p:extLst>
+  </p:cSld>
+  <p:clrMapOvr>
+    <a:masterClrMapping/>
+  </p:clrMapOvr>
+</p:sld>
+</file>
+
+<file path=ppt/slides/slide12.xml><?xml version="1.0" encoding="utf-8"?>
+<p:sld xmlns:a="http://schemas.openxmlformats.org/drawingml/2006/main" xmlns:r="http://schemas.openxmlformats.org/officeDocument/2006/relationships" xmlns:p="http://schemas.openxmlformats.org/presentationml/2006/main">
+  <p:cSld>
+    <p:spTree>
+      <p:nvGrpSpPr>
+        <p:cNvPr id="1" name="">
+          <a:extLst>
+            <a:ext uri="{FF2B5EF4-FFF2-40B4-BE49-F238E27FC236}">
+              <a16:creationId xmlns:a16="http://schemas.microsoft.com/office/drawing/2014/main" id="{2F4BD69F-56A1-0DC2-7BDB-DE593B307D78}"/>
+            </a:ext>
+          </a:extLst>
+        </p:cNvPr>
+        <p:cNvGrpSpPr/>
+        <p:nvPr/>
+      </p:nvGrpSpPr>
+      <p:grpSpPr>
+        <a:xfrm>
+          <a:off x="0" y="0"/>
+          <a:ext cx="0" cy="0"/>
+          <a:chOff x="0" y="0"/>
+          <a:chExt cx="0" cy="0"/>
+        </a:xfrm>
+      </p:grpSpPr>
+      <p:sp>
+        <p:nvSpPr>
+          <p:cNvPr id="2" name="Title 1">
+            <a:extLst>
+              <a:ext uri="{FF2B5EF4-FFF2-40B4-BE49-F238E27FC236}">
+                <a16:creationId xmlns:a16="http://schemas.microsoft.com/office/drawing/2014/main" id="{B8000DD6-197F-6FE9-423E-A163C78F9CCF}"/>
+              </a:ext>
+            </a:extLst>
+          </p:cNvPr>
+          <p:cNvSpPr>
+            <a:spLocks noGrp="1"/>
+          </p:cNvSpPr>
+          <p:nvPr>
+            <p:ph type="title"/>
+          </p:nvPr>
+        </p:nvSpPr>
+        <p:spPr/>
+        <p:txBody>
+          <a:bodyPr/>
+          <a:lstStyle/>
+          <a:p>
+            <a:r>
+              <a:rPr lang="en-IN" dirty="0"/>
+              <a:t> Dynamic Allocation:</a:t>
+            </a:r>
+          </a:p>
+        </p:txBody>
+      </p:sp>
+      <p:sp>
+        <p:nvSpPr>
+          <p:cNvPr id="3" name="Content Placeholder 2">
+            <a:extLst>
+              <a:ext uri="{FF2B5EF4-FFF2-40B4-BE49-F238E27FC236}">
+                <a16:creationId xmlns:a16="http://schemas.microsoft.com/office/drawing/2014/main" id="{A6755A99-8278-5C00-FF0D-B5E6C8BD63DB}"/>
+              </a:ext>
+            </a:extLst>
+          </p:cNvPr>
+          <p:cNvSpPr>
+            <a:spLocks noGrp="1"/>
+          </p:cNvSpPr>
+          <p:nvPr>
+            <p:ph idx="1"/>
+          </p:nvPr>
+        </p:nvSpPr>
+        <p:spPr>
+          <a:xfrm>
+            <a:off x="838200" y="1690688"/>
+            <a:ext cx="10515600" cy="4351338"/>
+          </a:xfrm>
+        </p:spPr>
+        <p:txBody>
+          <a:bodyPr/>
+          <a:lstStyle/>
+          <a:p>
+            <a:r>
+              <a:rPr lang="en-IN" dirty="0"/>
+              <a:t> Dynamic Allocation:</a:t>
+            </a:r>
+          </a:p>
+          <a:p>
+            <a:pPr lvl="1"/>
+            <a:r>
+              <a:rPr lang="en-IN" dirty="0"/>
+              <a:t>Enable dynamic allocation for scaling executors based on workload.</a:t>
+            </a:r>
+          </a:p>
+          <a:p>
+            <a:pPr marL="0" indent="0">
+              <a:buNone/>
+            </a:pPr>
+            <a:r>
+              <a:rPr lang="en-IN" dirty="0"/>
+              <a:t>   </a:t>
+            </a:r>
+          </a:p>
+          <a:p>
+            <a:r>
+              <a:rPr lang="en-IN" dirty="0"/>
+              <a:t>Example:</a:t>
+            </a:r>
+          </a:p>
+          <a:p>
+            <a:pPr marL="0" indent="0">
+              <a:buNone/>
+            </a:pPr>
+            <a:br>
+              <a:rPr lang="en-IN" dirty="0"/>
+            </a:br>
+            <a:r>
+              <a:rPr lang="en-IN" dirty="0"/>
+              <a:t>```python</a:t>
+            </a:r>
+          </a:p>
+          <a:p>
+            <a:pPr marL="0" indent="0">
+              <a:buNone/>
+            </a:pPr>
+            <a:r>
+              <a:rPr lang="en-IN" dirty="0" err="1"/>
+              <a:t>spark.conf.set</a:t>
+            </a:r>
+            <a:r>
+              <a:rPr lang="en-IN" dirty="0"/>
+              <a:t>("</a:t>
+            </a:r>
+            <a:r>
+              <a:rPr lang="en-IN" dirty="0" err="1"/>
+              <a:t>spark.dynamicAllocation.enabled</a:t>
+            </a:r>
+            <a:r>
+              <a:rPr lang="en-IN" dirty="0"/>
+              <a:t>", "true")</a:t>
+            </a:r>
+          </a:p>
+          <a:p>
+            <a:pPr marL="0" indent="0">
+              <a:buNone/>
+            </a:pPr>
+            <a:r>
+              <a:rPr lang="en-IN" dirty="0"/>
+              <a:t>```</a:t>
+            </a:r>
+          </a:p>
+        </p:txBody>
+      </p:sp>
+    </p:spTree>
+    <p:extLst>
+      <p:ext uri="{BB962C8B-B14F-4D97-AF65-F5344CB8AC3E}">
+        <p14:creationId xmlns:p14="http://schemas.microsoft.com/office/powerpoint/2010/main" val="1913854002"/>
+      </p:ext>
+    </p:extLst>
+  </p:cSld>
+  <p:clrMapOvr>
+    <a:masterClrMapping/>
+  </p:clrMapOvr>
+</p:sld>
+</file>
+
+<file path=ppt/slides/slide13.xml><?xml version="1.0" encoding="utf-8"?>
+<p:sld xmlns:a="http://schemas.openxmlformats.org/drawingml/2006/main" xmlns:r="http://schemas.openxmlformats.org/officeDocument/2006/relationships" xmlns:p="http://schemas.openxmlformats.org/presentationml/2006/main">
+  <p:cSld>
+    <p:spTree>
+      <p:nvGrpSpPr>
+        <p:cNvPr id="1" name="">
+          <a:extLst>
+            <a:ext uri="{FF2B5EF4-FFF2-40B4-BE49-F238E27FC236}">
+              <a16:creationId xmlns:a16="http://schemas.microsoft.com/office/drawing/2014/main" id="{9203720E-2A91-4F93-31C7-9210BAD01CBD}"/>
+            </a:ext>
+          </a:extLst>
+        </p:cNvPr>
+        <p:cNvGrpSpPr/>
+        <p:nvPr/>
+      </p:nvGrpSpPr>
+      <p:grpSpPr>
+        <a:xfrm>
+          <a:off x="0" y="0"/>
+          <a:ext cx="0" cy="0"/>
+          <a:chOff x="0" y="0"/>
+          <a:chExt cx="0" cy="0"/>
+        </a:xfrm>
+      </p:grpSpPr>
+      <p:sp>
+        <p:nvSpPr>
+          <p:cNvPr id="2" name="Title 1">
+            <a:extLst>
+              <a:ext uri="{FF2B5EF4-FFF2-40B4-BE49-F238E27FC236}">
+                <a16:creationId xmlns:a16="http://schemas.microsoft.com/office/drawing/2014/main" id="{8DC42CFC-844A-C230-E234-4888EA46BE26}"/>
+              </a:ext>
+            </a:extLst>
+          </p:cNvPr>
+          <p:cNvSpPr>
+            <a:spLocks noGrp="1"/>
+          </p:cNvSpPr>
+          <p:nvPr>
+            <p:ph type="title"/>
+          </p:nvPr>
+        </p:nvSpPr>
+        <p:spPr/>
+        <p:txBody>
+          <a:bodyPr/>
+          <a:lstStyle/>
+          <a:p>
+            <a:r>
+              <a:rPr lang="en-IN" dirty="0"/>
+              <a:t> Shuffle Partitions:</a:t>
+            </a:r>
+          </a:p>
+        </p:txBody>
+      </p:sp>
+      <p:sp>
+        <p:nvSpPr>
+          <p:cNvPr id="3" name="Content Placeholder 2">
+            <a:extLst>
+              <a:ext uri="{FF2B5EF4-FFF2-40B4-BE49-F238E27FC236}">
+                <a16:creationId xmlns:a16="http://schemas.microsoft.com/office/drawing/2014/main" id="{C2C44D84-13C8-3C14-B7B0-29D178C6071E}"/>
+              </a:ext>
+            </a:extLst>
+          </p:cNvPr>
+          <p:cNvSpPr>
+            <a:spLocks noGrp="1"/>
+          </p:cNvSpPr>
+          <p:nvPr>
+            <p:ph idx="1"/>
+          </p:nvPr>
+        </p:nvSpPr>
+        <p:spPr>
+          <a:xfrm>
+            <a:off x="838200" y="1690688"/>
+            <a:ext cx="10515600" cy="4351338"/>
+          </a:xfrm>
+        </p:spPr>
+        <p:txBody>
+          <a:bodyPr/>
+          <a:lstStyle/>
+          <a:p>
+            <a:r>
+              <a:rPr lang="en-IN" dirty="0"/>
+              <a:t> Shuffle Partitions:</a:t>
+            </a:r>
+          </a:p>
+          <a:p>
+            <a:pPr lvl="1"/>
+            <a:r>
+              <a:rPr lang="en-IN" dirty="0"/>
+              <a:t>Tune the number of shuffle partitions to avoid large shuffles.</a:t>
+            </a:r>
+          </a:p>
+          <a:p>
+            <a:pPr marL="0" indent="0">
+              <a:buNone/>
+            </a:pPr>
+            <a:r>
+              <a:rPr lang="en-IN" dirty="0"/>
+              <a:t> </a:t>
+            </a:r>
+          </a:p>
+          <a:p>
+            <a:r>
+              <a:rPr lang="en-IN" dirty="0"/>
+              <a:t>Example:</a:t>
+            </a:r>
+          </a:p>
+          <a:p>
+            <a:pPr marL="0" indent="0">
+              <a:buNone/>
+            </a:pPr>
+            <a:br>
+              <a:rPr lang="en-IN" dirty="0"/>
+            </a:br>
+            <a:r>
+              <a:rPr lang="en-IN" dirty="0"/>
+              <a:t>```python</a:t>
+            </a:r>
+          </a:p>
+          <a:p>
+            <a:pPr marL="0" indent="0">
+              <a:buNone/>
+            </a:pPr>
+            <a:r>
+              <a:rPr lang="en-IN" dirty="0" err="1"/>
+              <a:t>spark.conf.set</a:t>
+            </a:r>
+            <a:r>
+              <a:rPr lang="en-IN" dirty="0"/>
+              <a:t>("</a:t>
+            </a:r>
+            <a:r>
+              <a:rPr lang="en-IN" dirty="0" err="1"/>
+              <a:t>spark.sql.shuffle.partitions</a:t>
+            </a:r>
+            <a:r>
+              <a:rPr lang="en-IN" dirty="0"/>
+              <a:t>", 200)</a:t>
+            </a:r>
+          </a:p>
+          <a:p>
+            <a:pPr marL="0" indent="0">
+              <a:buNone/>
+            </a:pPr>
+            <a:r>
+              <a:rPr lang="en-IN" dirty="0"/>
+              <a:t>```</a:t>
+            </a:r>
+          </a:p>
+        </p:txBody>
+      </p:sp>
+    </p:spTree>
+    <p:extLst>
+      <p:ext uri="{BB962C8B-B14F-4D97-AF65-F5344CB8AC3E}">
+        <p14:creationId xmlns:p14="http://schemas.microsoft.com/office/powerpoint/2010/main" val="196103846"/>
+      </p:ext>
+    </p:extLst>
+  </p:cSld>
+  <p:clrMapOvr>
+    <a:masterClrMapping/>
+  </p:clrMapOvr>
+</p:sld>
+</file>
+
+<file path=ppt/slides/slide14.xml><?xml version="1.0" encoding="utf-8"?>
+<p:sld xmlns:a="http://schemas.openxmlformats.org/drawingml/2006/main" xmlns:r="http://schemas.openxmlformats.org/officeDocument/2006/relationships" xmlns:p="http://schemas.openxmlformats.org/presentationml/2006/main">
+  <p:cSld>
+    <p:spTree>
+      <p:nvGrpSpPr>
+        <p:cNvPr id="1" name="">
+          <a:extLst>
+            <a:ext uri="{FF2B5EF4-FFF2-40B4-BE49-F238E27FC236}">
+              <a16:creationId xmlns:a16="http://schemas.microsoft.com/office/drawing/2014/main" id="{8B91AC0C-B75E-FE40-2CC3-30AAF35CEDAD}"/>
+            </a:ext>
+          </a:extLst>
+        </p:cNvPr>
+        <p:cNvGrpSpPr/>
+        <p:nvPr/>
+      </p:nvGrpSpPr>
+      <p:grpSpPr>
+        <a:xfrm>
+          <a:off x="0" y="0"/>
+          <a:ext cx="0" cy="0"/>
+          <a:chOff x="0" y="0"/>
+          <a:chExt cx="0" cy="0"/>
+        </a:xfrm>
+      </p:grpSpPr>
+      <p:sp>
+        <p:nvSpPr>
+          <p:cNvPr id="2" name="Title 1">
+            <a:extLst>
+              <a:ext uri="{FF2B5EF4-FFF2-40B4-BE49-F238E27FC236}">
+                <a16:creationId xmlns:a16="http://schemas.microsoft.com/office/drawing/2014/main" id="{09815769-A6D5-7DFC-941A-BBEE9BEA8280}"/>
+              </a:ext>
+            </a:extLst>
+          </p:cNvPr>
+          <p:cNvSpPr>
+            <a:spLocks noGrp="1"/>
+          </p:cNvSpPr>
+          <p:nvPr>
+            <p:ph type="ctrTitle"/>
+          </p:nvPr>
+        </p:nvSpPr>
+        <p:spPr>
+          <a:xfrm>
+            <a:off x="0" y="2746375"/>
+            <a:ext cx="12192000" cy="793750"/>
+          </a:xfrm>
+        </p:spPr>
+        <p:txBody>
+          <a:bodyPr rtlCol="0">
+            <a:normAutofit/>
+          </a:bodyPr>
+          <a:lstStyle/>
+          <a:p>
+            <a:pPr fontAlgn="auto">
+              <a:spcAft>
+                <a:spcPts val="0"/>
+              </a:spcAft>
+              <a:defRPr/>
+            </a:pPr>
+            <a:r>
+              <a:rPr lang="en-US" sz="4000" dirty="0"/>
+              <a:t>Optimizing Data Storage</a:t>
+            </a:r>
+          </a:p>
+        </p:txBody>
+      </p:sp>
+    </p:spTree>
+    <p:extLst>
+      <p:ext uri="{BB962C8B-B14F-4D97-AF65-F5344CB8AC3E}">
+        <p14:creationId xmlns:p14="http://schemas.microsoft.com/office/powerpoint/2010/main" val="937685338"/>
+      </p:ext>
+    </p:extLst>
+  </p:cSld>
+  <p:clrMapOvr>
+    <a:masterClrMapping/>
+  </p:clrMapOvr>
+  <p:timing>
+    <p:tnLst>
+      <p:par>
+        <p:cTn id="1" dur="indefinite" restart="never" nodeType="tmRoot">
+          <p:childTnLst>
+            <p:seq concurrent="1" nextAc="seek">
+              <p:cTn id="2" dur="indefinite" nodeType="mainSeq">
+                <p:childTnLst>
+                  <p:par>
+                    <p:cTn id="3" fill="hold" nodeType="clickPar">
+                      <p:stCondLst>
+                        <p:cond delay="indefinite"/>
+                      </p:stCondLst>
+                      <p:childTnLst>
+                        <p:par>
+                          <p:cTn id="4" fill="hold" nodeType="withGroup">
+                            <p:stCondLst>
+                              <p:cond delay="0"/>
+                            </p:stCondLst>
+                            <p:childTnLst>
+                              <p:par>
+                                <p:cTn id="5" presetID="2" presetClass="entr" presetSubtype="8" fill="hold" grpId="0" nodeType="clickEffect">
+                                  <p:stCondLst>
+                                    <p:cond delay="0"/>
+                                  </p:stCondLst>
+                                  <p:childTnLst>
+                                    <p:set>
+                                      <p:cBhvr>
+                                        <p:cTn id="6" dur="1" fill="hold">
+                                          <p:stCondLst>
+                                            <p:cond delay="0"/>
+                                          </p:stCondLst>
+                                        </p:cTn>
+                                        <p:tgtEl>
+                                          <p:spTgt spid="2"/>
+                                        </p:tgtEl>
+                                        <p:attrNameLst>
+                                          <p:attrName>style.visibility</p:attrName>
+                                        </p:attrNameLst>
+                                      </p:cBhvr>
+                                      <p:to>
+                                        <p:strVal val="visible"/>
+                                      </p:to>
+                                    </p:set>
+                                    <p:anim calcmode="lin" valueType="num">
+                                      <p:cBhvr additive="base">
+                                        <p:cTn id="7" dur="500" fill="hold"/>
+                                        <p:tgtEl>
+                                          <p:spTgt spid="2"/>
+                                        </p:tgtEl>
+                                        <p:attrNameLst>
+                                          <p:attrName>ppt_x</p:attrName>
+                                        </p:attrNameLst>
+                                      </p:cBhvr>
+                                      <p:tavLst>
+                                        <p:tav tm="0">
+                                          <p:val>
+                                            <p:strVal val="0-#ppt_w/2"/>
+                                          </p:val>
+                                        </p:tav>
+                                        <p:tav tm="100000">
+                                          <p:val>
+                                            <p:strVal val="#ppt_x"/>
+                                          </p:val>
+                                        </p:tav>
+                                      </p:tavLst>
+                                    </p:anim>
+                                    <p:anim calcmode="lin" valueType="num">
+                                      <p:cBhvr additive="base">
+                                        <p:cTn id="8" dur="500" fill="hold"/>
+                                        <p:tgtEl>
+                                          <p:spTgt spid="2"/>
+                                        </p:tgtEl>
+                                        <p:attrNameLst>
+                                          <p:attrName>ppt_y</p:attrName>
+                                        </p:attrNameLst>
+                                      </p:cBhvr>
+                                      <p:tavLst>
+                                        <p:tav tm="0">
+                                          <p:val>
+                                            <p:strVal val="#ppt_y"/>
+                                          </p:val>
+                                        </p:tav>
+                                        <p:tav tm="100000">
+                                          <p:val>
+                                            <p:strVal val="#ppt_y"/>
+                                          </p:val>
+                                        </p:tav>
+                                      </p:tavLst>
+                                    </p:anim>
+                                  </p:childTnLst>
+                                </p:cTn>
+                              </p:par>
+                            </p:childTnLst>
+                          </p:cTn>
+                        </p:par>
+                      </p:childTnLst>
+                    </p:cTn>
+                  </p:par>
+                </p:childTnLst>
+              </p:cTn>
+              <p:prevCondLst>
+                <p:cond evt="onPrev" delay="0">
+                  <p:tgtEl>
+                    <p:sldTgt/>
+                  </p:tgtEl>
+                </p:cond>
+              </p:prevCondLst>
+              <p:nextCondLst>
+                <p:cond evt="onNext" delay="0">
+                  <p:tgtEl>
+                    <p:sldTgt/>
+                  </p:tgtEl>
+                </p:cond>
+              </p:nextCondLst>
+            </p:seq>
+          </p:childTnLst>
+        </p:cTn>
+      </p:par>
+    </p:tnLst>
+    <p:bldLst>
+      <p:bldP spid="2" grpId="0"/>
+    </p:bldLst>
+  </p:timing>
+</p:sld>
+</file>
+
+<file path=ppt/slides/slide15.xml><?xml version="1.0" encoding="utf-8"?>
+<p:sld xmlns:a="http://schemas.openxmlformats.org/drawingml/2006/main" xmlns:r="http://schemas.openxmlformats.org/officeDocument/2006/relationships" xmlns:p="http://schemas.openxmlformats.org/presentationml/2006/main">
+  <p:cSld>
+    <p:spTree>
+      <p:nvGrpSpPr>
+        <p:cNvPr id="1" name=""/>
+        <p:cNvGrpSpPr/>
+        <p:nvPr/>
+      </p:nvGrpSpPr>
+      <p:grpSpPr>
+        <a:xfrm>
+          <a:off x="0" y="0"/>
+          <a:ext cx="0" cy="0"/>
+          <a:chOff x="0" y="0"/>
+          <a:chExt cx="0" cy="0"/>
+        </a:xfrm>
+      </p:grpSpPr>
+      <p:sp>
+        <p:nvSpPr>
+          <p:cNvPr id="2" name="Title 1">
+            <a:extLst>
+              <a:ext uri="{FF2B5EF4-FFF2-40B4-BE49-F238E27FC236}">
+                <a16:creationId xmlns:a16="http://schemas.microsoft.com/office/drawing/2014/main" id="{F6CDC3F4-1B0F-FECB-B4FB-1900CB861D7C}"/>
+              </a:ext>
+            </a:extLst>
+          </p:cNvPr>
+          <p:cNvSpPr>
+            <a:spLocks noGrp="1"/>
+          </p:cNvSpPr>
+          <p:nvPr>
+            <p:ph type="title"/>
+          </p:nvPr>
+        </p:nvSpPr>
+        <p:spPr/>
+        <p:txBody>
+          <a:bodyPr/>
+          <a:lstStyle/>
+          <a:p>
+            <a:r>
+              <a:rPr lang="en-IN" dirty="0"/>
+              <a:t> Use Efficient File Formats:</a:t>
+            </a:r>
+          </a:p>
+        </p:txBody>
+      </p:sp>
+      <p:sp>
+        <p:nvSpPr>
+          <p:cNvPr id="3" name="Content Placeholder 2">
+            <a:extLst>
+              <a:ext uri="{FF2B5EF4-FFF2-40B4-BE49-F238E27FC236}">
+                <a16:creationId xmlns:a16="http://schemas.microsoft.com/office/drawing/2014/main" id="{96FF2034-FF6C-A18B-5F96-CA5B25140988}"/>
+              </a:ext>
+            </a:extLst>
+          </p:cNvPr>
+          <p:cNvSpPr>
+            <a:spLocks noGrp="1"/>
+          </p:cNvSpPr>
+          <p:nvPr>
+            <p:ph idx="1"/>
+          </p:nvPr>
+        </p:nvSpPr>
+        <p:spPr/>
+        <p:txBody>
+          <a:bodyPr/>
+          <a:lstStyle/>
+          <a:p>
+            <a:r>
+              <a:rPr lang="en-IN" dirty="0"/>
+              <a:t>   Delta Lake and Parquet formats for optimized storage and performance.</a:t>
+            </a:r>
+          </a:p>
+          <a:p>
+            <a:r>
+              <a:rPr lang="en-IN" dirty="0"/>
+              <a:t>   Example (Delta Lake):</a:t>
+            </a:r>
+          </a:p>
+          <a:p>
+            <a:br>
+              <a:rPr lang="en-IN" dirty="0"/>
+            </a:br>
+            <a:r>
+              <a:rPr lang="en-IN" dirty="0"/>
+              <a:t>    ```python</a:t>
+            </a:r>
+          </a:p>
+          <a:p>
+            <a:r>
+              <a:rPr lang="en-IN" dirty="0"/>
+              <a:t>    </a:t>
+            </a:r>
+            <a:r>
+              <a:rPr lang="en-IN" dirty="0" err="1"/>
+              <a:t>df.write.format</a:t>
+            </a:r>
+            <a:r>
+              <a:rPr lang="en-IN" dirty="0"/>
+              <a:t>("delta").save("/</a:t>
+            </a:r>
+            <a:r>
+              <a:rPr lang="en-IN" dirty="0" err="1"/>
+              <a:t>mnt</a:t>
+            </a:r>
+            <a:r>
+              <a:rPr lang="en-IN" dirty="0"/>
+              <a:t>/data/</a:t>
+            </a:r>
+            <a:r>
+              <a:rPr lang="en-IN" dirty="0" err="1"/>
+              <a:t>delta_table</a:t>
+            </a:r>
+            <a:r>
+              <a:rPr lang="en-IN" dirty="0"/>
+              <a:t>")</a:t>
+            </a:r>
+          </a:p>
+          <a:p>
+            <a:r>
+              <a:rPr lang="en-IN" dirty="0"/>
+              <a:t>    ```</a:t>
+            </a:r>
+          </a:p>
+          <a:p>
+            <a:endParaRPr lang="en-IN" dirty="0"/>
+          </a:p>
+        </p:txBody>
+      </p:sp>
+    </p:spTree>
+    <p:extLst>
+      <p:ext uri="{BB962C8B-B14F-4D97-AF65-F5344CB8AC3E}">
+        <p14:creationId xmlns:p14="http://schemas.microsoft.com/office/powerpoint/2010/main" val="4154163336"/>
+      </p:ext>
+    </p:extLst>
+  </p:cSld>
+  <p:clrMapOvr>
+    <a:masterClrMapping/>
+  </p:clrMapOvr>
+</p:sld>
+</file>
+
+<file path=ppt/slides/slide16.xml><?xml version="1.0" encoding="utf-8"?>
+<p:sld xmlns:a="http://schemas.openxmlformats.org/drawingml/2006/main" xmlns:r="http://schemas.openxmlformats.org/officeDocument/2006/relationships" xmlns:p="http://schemas.openxmlformats.org/presentationml/2006/main">
+  <p:cSld>
+    <p:spTree>
+      <p:nvGrpSpPr>
+        <p:cNvPr id="1" name="">
+          <a:extLst>
+            <a:ext uri="{FF2B5EF4-FFF2-40B4-BE49-F238E27FC236}">
+              <a16:creationId xmlns:a16="http://schemas.microsoft.com/office/drawing/2014/main" id="{CFA72F00-EAF5-A1B0-210B-7244124EF7D9}"/>
+            </a:ext>
+          </a:extLst>
+        </p:cNvPr>
+        <p:cNvGrpSpPr/>
+        <p:nvPr/>
+      </p:nvGrpSpPr>
+      <p:grpSpPr>
+        <a:xfrm>
+          <a:off x="0" y="0"/>
+          <a:ext cx="0" cy="0"/>
+          <a:chOff x="0" y="0"/>
+          <a:chExt cx="0" cy="0"/>
+        </a:xfrm>
+      </p:grpSpPr>
+      <p:sp>
+        <p:nvSpPr>
+          <p:cNvPr id="2" name="Title 1">
+            <a:extLst>
+              <a:ext uri="{FF2B5EF4-FFF2-40B4-BE49-F238E27FC236}">
+                <a16:creationId xmlns:a16="http://schemas.microsoft.com/office/drawing/2014/main" id="{8A029A80-EAB2-54D1-BD26-C04304F384EE}"/>
+              </a:ext>
+            </a:extLst>
+          </p:cNvPr>
+          <p:cNvSpPr>
+            <a:spLocks noGrp="1"/>
+          </p:cNvSpPr>
+          <p:nvPr>
+            <p:ph type="title"/>
+          </p:nvPr>
+        </p:nvSpPr>
+        <p:spPr/>
+        <p:txBody>
+          <a:bodyPr/>
+          <a:lstStyle/>
+          <a:p>
+            <a:r>
+              <a:rPr lang="en-IN" dirty="0"/>
+              <a:t> Use Efficient File Formats:</a:t>
+            </a:r>
+          </a:p>
+        </p:txBody>
+      </p:sp>
+      <p:sp>
+        <p:nvSpPr>
+          <p:cNvPr id="3" name="Content Placeholder 2">
+            <a:extLst>
+              <a:ext uri="{FF2B5EF4-FFF2-40B4-BE49-F238E27FC236}">
+                <a16:creationId xmlns:a16="http://schemas.microsoft.com/office/drawing/2014/main" id="{5D1C4150-59BC-1F18-3968-1B957E8BA1A9}"/>
+              </a:ext>
+            </a:extLst>
+          </p:cNvPr>
+          <p:cNvSpPr>
+            <a:spLocks noGrp="1"/>
+          </p:cNvSpPr>
+          <p:nvPr>
+            <p:ph idx="1"/>
+          </p:nvPr>
+        </p:nvSpPr>
+        <p:spPr/>
+        <p:txBody>
+          <a:bodyPr/>
+          <a:lstStyle/>
+          <a:p>
+            <a:r>
+              <a:rPr lang="en-IN" dirty="0"/>
+              <a:t>   Partition datasets based on frequently queried columns for faster access.</a:t>
+            </a:r>
+          </a:p>
+          <a:p>
+            <a:pPr marL="0" indent="0">
+              <a:buNone/>
+            </a:pPr>
+            <a:endParaRPr lang="en-IN" dirty="0"/>
+          </a:p>
+          <a:p>
+            <a:pPr marL="0" indent="0">
+              <a:buNone/>
+            </a:pPr>
+            <a:r>
+              <a:rPr lang="en-IN" dirty="0"/>
+              <a:t>Example:</a:t>
+            </a:r>
+          </a:p>
+          <a:p>
+            <a:pPr marL="0" indent="0">
+              <a:buNone/>
+            </a:pPr>
+            <a:r>
+              <a:rPr lang="en-IN" dirty="0"/>
+              <a:t>```python</a:t>
+            </a:r>
+          </a:p>
+          <a:p>
+            <a:r>
+              <a:rPr lang="en-IN" dirty="0" err="1"/>
+              <a:t>df.write.partitionBy</a:t>
+            </a:r>
+            <a:r>
+              <a:rPr lang="en-IN" dirty="0"/>
+              <a:t>("year", "month").parquet("/</a:t>
+            </a:r>
+            <a:r>
+              <a:rPr lang="en-IN" dirty="0" err="1"/>
+              <a:t>mnt</a:t>
+            </a:r>
+            <a:r>
+              <a:rPr lang="en-IN" dirty="0"/>
+              <a:t>/data/")</a:t>
+            </a:r>
+          </a:p>
+          <a:p>
+            <a:pPr marL="0" indent="0">
+              <a:buNone/>
+            </a:pPr>
+            <a:r>
+              <a:rPr lang="en-IN" dirty="0"/>
+              <a:t>```</a:t>
+            </a:r>
+          </a:p>
+          <a:p>
+            <a:endParaRPr lang="en-IN" dirty="0"/>
+          </a:p>
+        </p:txBody>
+      </p:sp>
+    </p:spTree>
+    <p:extLst>
+      <p:ext uri="{BB962C8B-B14F-4D97-AF65-F5344CB8AC3E}">
+        <p14:creationId xmlns:p14="http://schemas.microsoft.com/office/powerpoint/2010/main" val="1371585690"/>
+      </p:ext>
+    </p:extLst>
+  </p:cSld>
+  <p:clrMapOvr>
+    <a:masterClrMapping/>
+  </p:clrMapOvr>
+</p:sld>
+</file>
+
+<file path=ppt/slides/slide17.xml><?xml version="1.0" encoding="utf-8"?>
+<p:sld xmlns:a="http://schemas.openxmlformats.org/drawingml/2006/main" xmlns:r="http://schemas.openxmlformats.org/officeDocument/2006/relationships" xmlns:p="http://schemas.openxmlformats.org/presentationml/2006/main">
+  <p:cSld>
+    <p:spTree>
+      <p:nvGrpSpPr>
+        <p:cNvPr id="1" name="">
+          <a:extLst>
+            <a:ext uri="{FF2B5EF4-FFF2-40B4-BE49-F238E27FC236}">
+              <a16:creationId xmlns:a16="http://schemas.microsoft.com/office/drawing/2014/main" id="{5C531CD2-9948-E568-A4FC-D151D4AAA7D0}"/>
+            </a:ext>
+          </a:extLst>
+        </p:cNvPr>
+        <p:cNvGrpSpPr/>
+        <p:nvPr/>
+      </p:nvGrpSpPr>
+      <p:grpSpPr>
+        <a:xfrm>
+          <a:off x="0" y="0"/>
+          <a:ext cx="0" cy="0"/>
+          <a:chOff x="0" y="0"/>
+          <a:chExt cx="0" cy="0"/>
+        </a:xfrm>
+      </p:grpSpPr>
+      <p:sp>
+        <p:nvSpPr>
+          <p:cNvPr id="2" name="Title 1">
+            <a:extLst>
+              <a:ext uri="{FF2B5EF4-FFF2-40B4-BE49-F238E27FC236}">
+                <a16:creationId xmlns:a16="http://schemas.microsoft.com/office/drawing/2014/main" id="{DD537B1C-24A9-C61A-D769-DE455AF83750}"/>
+              </a:ext>
+            </a:extLst>
+          </p:cNvPr>
+          <p:cNvSpPr>
+            <a:spLocks noGrp="1"/>
+          </p:cNvSpPr>
+          <p:nvPr>
+            <p:ph type="title"/>
+          </p:nvPr>
+        </p:nvSpPr>
+        <p:spPr/>
+        <p:txBody>
+          <a:bodyPr/>
+          <a:lstStyle/>
+          <a:p>
+            <a:r>
+              <a:rPr lang="en-IN" dirty="0"/>
+              <a:t> Use Efficient File Formats:</a:t>
+            </a:r>
+          </a:p>
+        </p:txBody>
+      </p:sp>
+      <p:sp>
+        <p:nvSpPr>
+          <p:cNvPr id="3" name="Content Placeholder 2">
+            <a:extLst>
+              <a:ext uri="{FF2B5EF4-FFF2-40B4-BE49-F238E27FC236}">
+                <a16:creationId xmlns:a16="http://schemas.microsoft.com/office/drawing/2014/main" id="{6E3DEB95-A86B-6972-8EDB-D614CBF2F558}"/>
+              </a:ext>
+            </a:extLst>
+          </p:cNvPr>
+          <p:cNvSpPr>
+            <a:spLocks noGrp="1"/>
+          </p:cNvSpPr>
+          <p:nvPr>
+            <p:ph idx="1"/>
+          </p:nvPr>
+        </p:nvSpPr>
+        <p:spPr/>
+        <p:txBody>
+          <a:bodyPr/>
+          <a:lstStyle/>
+          <a:p>
+            <a:r>
+              <a:rPr lang="en-US" dirty="0"/>
+              <a:t>   Cache frequently accessed data to reduce re-computation.</a:t>
+            </a:r>
+          </a:p>
+          <a:p>
+            <a:pPr marL="0" indent="0">
+              <a:buNone/>
+            </a:pPr>
+            <a:r>
+              <a:rPr lang="en-US" dirty="0"/>
+              <a:t>   </a:t>
+            </a:r>
+          </a:p>
+          <a:p>
+            <a:r>
+              <a:rPr lang="en-US"/>
+              <a:t>Example:</a:t>
+            </a:r>
+          </a:p>
+          <a:p>
+            <a:pPr marL="0" indent="0">
+              <a:buNone/>
+            </a:pPr>
+            <a:r>
+              <a:rPr lang="en-US"/>
+              <a:t>```</a:t>
+            </a:r>
+            <a:r>
+              <a:rPr lang="en-US" dirty="0"/>
+              <a:t>python</a:t>
+            </a:r>
+          </a:p>
+          <a:p>
+            <a:pPr marL="0" indent="0">
+              <a:buNone/>
+            </a:pPr>
+            <a:r>
+              <a:rPr lang="en-US" dirty="0" err="1"/>
+              <a:t>df.cache</a:t>
+            </a:r>
+            <a:r>
+              <a:rPr lang="en-US" dirty="0"/>
+              <a:t>()</a:t>
+            </a:r>
+          </a:p>
+          <a:p>
+            <a:pPr marL="0" indent="0">
+              <a:buNone/>
+            </a:pPr>
+            <a:r>
+              <a:rPr lang="en-US" dirty="0"/>
+              <a:t>```</a:t>
+            </a:r>
+          </a:p>
+          <a:p>
+            <a:endParaRPr lang="en-IN" dirty="0"/>
+          </a:p>
+        </p:txBody>
+      </p:sp>
+    </p:spTree>
+    <p:extLst>
+      <p:ext uri="{BB962C8B-B14F-4D97-AF65-F5344CB8AC3E}">
+        <p14:creationId xmlns:p14="http://schemas.microsoft.com/office/powerpoint/2010/main" val="3667983875"/>
+      </p:ext>
+    </p:extLst>
+  </p:cSld>
+  <p:clrMapOvr>
+    <a:masterClrMapping/>
+  </p:clrMapOvr>
 </p:sld>
 </file>
 
